--- a/reports/MLG04_第一阶段进度汇报_问题建模与基础流程验证.pptx
+++ b/reports/MLG04_第一阶段进度汇报_问题建模与基础流程验证.pptx
@@ -8160,7 +8160,7 @@
         </p:nvSpPr>
         <p:spPr>
           <a:xfrm>
-            <a:off x="896112" y="2322576"/>
+            <a:off x="896112" y="2391156"/>
             <a:ext cx="82296" cy="82296"/>
           </a:xfrm>
           <a:prstGeom prst="ellipse">
@@ -8226,7 +8226,7 @@
         </p:nvSpPr>
         <p:spPr>
           <a:xfrm>
-            <a:off x="896112" y="2761488"/>
+            <a:off x="896112" y="2830068"/>
             <a:ext cx="82296" cy="82296"/>
           </a:xfrm>
           <a:prstGeom prst="ellipse">
@@ -8292,7 +8292,7 @@
         </p:nvSpPr>
         <p:spPr>
           <a:xfrm>
-            <a:off x="896112" y="3200400"/>
+            <a:off x="896112" y="3268980"/>
             <a:ext cx="82296" cy="82296"/>
           </a:xfrm>
           <a:prstGeom prst="ellipse">
@@ -8358,7 +8358,7 @@
         </p:nvSpPr>
         <p:spPr>
           <a:xfrm>
-            <a:off x="896112" y="3639312"/>
+            <a:off x="896112" y="3707892"/>
             <a:ext cx="82296" cy="82296"/>
           </a:xfrm>
           <a:prstGeom prst="ellipse">
@@ -8424,7 +8424,7 @@
         </p:nvSpPr>
         <p:spPr>
           <a:xfrm>
-            <a:off x="896112" y="4078224"/>
+            <a:off x="896112" y="4146804"/>
             <a:ext cx="82296" cy="82296"/>
           </a:xfrm>
           <a:prstGeom prst="ellipse">
@@ -8490,7 +8490,7 @@
         </p:nvSpPr>
         <p:spPr>
           <a:xfrm>
-            <a:off x="896112" y="4517136"/>
+            <a:off x="896112" y="4585716"/>
             <a:ext cx="82296" cy="82296"/>
           </a:xfrm>
           <a:prstGeom prst="ellipse">
@@ -9132,7 +9132,7 @@
         </p:nvSpPr>
         <p:spPr>
           <a:xfrm>
-            <a:off x="6016752" y="4005072"/>
+            <a:off x="6016752" y="3968496"/>
             <a:ext cx="5029200" cy="228600"/>
           </a:xfrm>
           <a:prstGeom prst="rect">
@@ -9165,9 +9165,84 @@
           </a:p>
         </p:txBody>
       </p:sp>
+      <p:sp>
+        <p:nvSpPr>
+          <p:cNvPr id="38" name="Text 36"/>
+          <p:cNvSpPr/>
+          <p:nvPr/>
+        </p:nvSpPr>
+        <p:spPr>
+          <a:xfrm>
+            <a:off x="6016752" y="4462272"/>
+            <a:ext cx="1874520" cy="841248"/>
+          </a:xfrm>
+          <a:prstGeom prst="rect">
+            <a:avLst/>
+          </a:prstGeom>
+          <a:noFill/>
+          <a:ln/>
+        </p:spPr>
+        <p:txBody>
+          <a:bodyPr wrap="square" lIns="0" tIns="0" rIns="0" bIns="0" rtlCol="0" anchor="t">
+            <a:normAutofit/>
+          </a:bodyPr>
+          <a:lstStyle/>
+          <a:p>
+            <a:pPr algn="l" indent="0" marL="0">
+              <a:buNone/>
+            </a:pPr>
+            <a:r>
+              <a:rPr lang="en-US" sz="1150" dirty="0">
+                <a:solidFill>
+                  <a:srgbClr val="24455D"/>
+                </a:solidFill>
+                <a:latin typeface="Microsoft YaHei" pitchFamily="34" charset="0"/>
+                <a:ea typeface="Microsoft YaHei" pitchFamily="34" charset="-122"/>
+                <a:cs typeface="Microsoft YaHei" pitchFamily="34" charset="-120"/>
+              </a:rPr>
+              <a:t>Python 3.13.5</a:t>
+            </a:r>
+            <a:endParaRPr lang="en-US" sz="1150" dirty="0"/>
+          </a:p>
+          <a:p>
+            <a:pPr algn="l" indent="0" marL="0">
+              <a:buNone/>
+            </a:pPr>
+            <a:r>
+              <a:rPr lang="en-US" sz="1150" dirty="0">
+                <a:solidFill>
+                  <a:srgbClr val="24455D"/>
+                </a:solidFill>
+                <a:latin typeface="Microsoft YaHei" pitchFamily="34" charset="0"/>
+                <a:ea typeface="Microsoft YaHei" pitchFamily="34" charset="-122"/>
+                <a:cs typeface="Microsoft YaHei" pitchFamily="34" charset="-120"/>
+              </a:rPr>
+              <a:t>seed 20260911</a:t>
+            </a:r>
+            <a:endParaRPr lang="en-US" sz="1150" dirty="0"/>
+          </a:p>
+          <a:p>
+            <a:pPr algn="l" indent="0" marL="0">
+              <a:buNone/>
+            </a:pPr>
+            <a:r>
+              <a:rPr lang="en-US" sz="1150" dirty="0">
+                <a:solidFill>
+                  <a:srgbClr val="24455D"/>
+                </a:solidFill>
+                <a:latin typeface="Microsoft YaHei" pitchFamily="34" charset="0"/>
+                <a:ea typeface="Microsoft YaHei" pitchFamily="34" charset="-122"/>
+                <a:cs typeface="Microsoft YaHei" pitchFamily="34" charset="-120"/>
+              </a:rPr>
+              <a:t>5 个主线工具当前未检测到</a:t>
+            </a:r>
+            <a:endParaRPr lang="en-US" sz="1150" dirty="0"/>
+          </a:p>
+        </p:txBody>
+      </p:sp>
       <p:pic>
         <p:nvPicPr>
-          <p:cNvPr id="38" name="Image 0" descr="D:\大三上小学期\机器学习综合实践\ml-project\reports\M1证据_可复现环境检查.png">    </p:cNvPr>
+          <p:cNvPr id="39" name="Image 0" descr="D:\大三上小学期\机器学习综合实践\ml-project\reports\M1证据_可复现环境检查.png">    </p:cNvPr>
           <p:cNvPicPr>
             <a:picLocks noChangeAspect="1"/>
           </p:cNvPicPr>
@@ -9181,8 +9256,8 @@
         </p:blipFill>
         <p:spPr>
           <a:xfrm>
-            <a:off x="5989320" y="4343400"/>
-            <a:ext cx="5349240" cy="1499616"/>
+            <a:off x="8065008" y="4261104"/>
+            <a:ext cx="3218688" cy="1810512"/>
           </a:xfrm>
           <a:prstGeom prst="rect">
             <a:avLst/>
@@ -9191,7 +9266,7 @@
       </p:pic>
       <p:sp>
         <p:nvSpPr>
-          <p:cNvPr id="39" name="Text 36"/>
+          <p:cNvPr id="40" name="Text 37"/>
           <p:cNvSpPr/>
           <p:nvPr/>
         </p:nvSpPr>

--- a/reports/MLG04_第一阶段进度汇报_问题建模与基础流程验证.pptx
+++ b/reports/MLG04_第一阶段进度汇报_问题建模与基础流程验证.pptx
@@ -4,6 +4,9 @@
   <p:sldMasterIdLst>
     <p:sldMasterId id="2147483648" r:id="rId1"/>
   </p:sldMasterIdLst>
+  <p:notesMasterIdLst>
+    <p:notesMasterId r:id="rId9"/>
+  </p:notesMasterIdLst>
   <p:sldIdLst>
     <p:sldId id="256" r:id="rId2"/>
     <p:sldId id="257" r:id="rId3"/>
@@ -13,9 +16,6 @@
     <p:sldId id="261" r:id="rId7"/>
     <p:sldId id="262" r:id="rId8"/>
   </p:sldIdLst>
-  <p:notesMasterIdLst>
-    <p:notesMasterId r:id="rId9"/>
-  </p:notesMasterIdLst>
   <p:sldSz cx="12192000" cy="6858000"/>
   <p:notesSz cx="6858000" cy="12192000"/>
   <p:defaultTextStyle>
@@ -110,6 +110,11 @@
       </a:defRPr>
     </a:lvl9pPr>
   </p:defaultTextStyle>
+  <p:extLst>
+    <p:ext uri="{EFAFB233-063F-42B5-8137-9DF3F51BA10A}">
+      <p15:sldGuideLst xmlns:p15="http://schemas.microsoft.com/office/powerpoint/2012/main"/>
+    </p:ext>
+  </p:extLst>
 </p:presentation>
 </file>
 
@@ -135,234 +140,10 @@
           <a:chExt cx="0" cy="0"/>
         </a:xfrm>
       </p:grpSpPr>
-      <p:sp>
-        <p:nvSpPr>
-          <p:cNvPr id="2" name="Header Placeholder 1"/>
-          <p:cNvSpPr>
-            <a:spLocks noGrp="1"/>
-          </p:cNvSpPr>
-          <p:nvPr>
-            <p:ph type="hdr" sz="quarter"/>
-          </p:nvPr>
-        </p:nvSpPr>
-        <p:spPr>
-          <a:xfrm>
-            <a:off x="0" y="0"/>
-            <a:ext cx="2971800" cy="458788"/>
-          </a:xfrm>
-          <a:prstGeom prst="rect">
-            <a:avLst/>
-          </a:prstGeom>
-        </p:spPr>
-        <p:txBody>
-          <a:bodyPr vert="horz" lIns="91440" tIns="45720" rIns="91440" bIns="45720" rtlCol="0"/>
-          <a:lstStyle>
-            <a:lvl1pPr algn="l">
-              <a:defRPr sz="1200"/>
-            </a:lvl1pPr>
-          </a:lstStyle>
-          <a:p>
-            <a:endParaRPr lang="en-US"/>
-          </a:p>
-        </p:txBody>
-      </p:sp>
-      <p:sp>
-        <p:nvSpPr>
-          <p:cNvPr id="3" name="Date Placeholder 2"/>
-          <p:cNvSpPr>
-            <a:spLocks noGrp="1"/>
-          </p:cNvSpPr>
-          <p:nvPr>
-            <p:ph type="dt" idx="1"/>
-          </p:nvPr>
-        </p:nvSpPr>
-        <p:spPr>
-          <a:xfrm>
-            <a:off x="3884613" y="0"/>
-            <a:ext cx="2971800" cy="458788"/>
-          </a:xfrm>
-          <a:prstGeom prst="rect">
-            <a:avLst/>
-          </a:prstGeom>
-        </p:spPr>
-        <p:txBody>
-          <a:bodyPr vert="horz" lIns="91440" tIns="45720" rIns="91440" bIns="45720" rtlCol="0"/>
-          <a:lstStyle>
-            <a:lvl1pPr algn="r">
-              <a:defRPr sz="1200"/>
-            </a:lvl1pPr>
-          </a:lstStyle>
-          <a:p>
-            <a:fld id="{5282F153-3F37-0F45-9E97-73ACFA13230C}" type="datetimeFigureOut">
-              <a:rPr lang="en-US"/>
-              <a:t>7/23/19</a:t>
-            </a:fld>
-            <a:endParaRPr lang="en-US"/>
-          </a:p>
-        </p:txBody>
-      </p:sp>
-      <p:sp>
-        <p:nvSpPr>
-          <p:cNvPr id="4" name="Slide Image Placeholder 3"/>
-          <p:cNvSpPr>
-            <a:spLocks noGrp="1" noRot="1" noChangeAspect="1"/>
-          </p:cNvSpPr>
-          <p:nvPr>
-            <p:ph type="sldImg" idx="2"/>
-          </p:nvPr>
-        </p:nvSpPr>
-        <p:spPr>
-          <a:xfrm>
-            <a:off x="685800" y="1143000"/>
-            <a:ext cx="5486400" cy="3086100"/>
-          </a:xfrm>
-          <a:prstGeom prst="rect">
-            <a:avLst/>
-          </a:prstGeom>
-          <a:noFill/>
-          <a:ln w="12700">
-            <a:solidFill>
-              <a:prstClr val="black"/>
-            </a:solidFill>
-          </a:ln>
-        </p:spPr>
-        <p:txBody>
-          <a:bodyPr vert="horz" lIns="91440" tIns="45720" rIns="91440" bIns="45720" rtlCol="0" anchor="ctr"/>
-          <a:lstStyle/>
-          <a:p>
-            <a:endParaRPr lang="en-US"/>
-          </a:p>
-        </p:txBody>
-      </p:sp>
-      <p:sp>
-        <p:nvSpPr>
-          <p:cNvPr id="5" name="Notes Placeholder 4"/>
-          <p:cNvSpPr>
-            <a:spLocks noGrp="1"/>
-          </p:cNvSpPr>
-          <p:nvPr>
-            <p:ph type="body" sz="quarter" idx="3"/>
-          </p:nvPr>
-        </p:nvSpPr>
-        <p:spPr>
-          <a:xfrm>
-            <a:off x="685800" y="4400550"/>
-            <a:ext cx="5486400" cy="3600450"/>
-          </a:xfrm>
-          <a:prstGeom prst="rect">
-            <a:avLst/>
-          </a:prstGeom>
-        </p:spPr>
-        <p:txBody>
-          <a:bodyPr vert="horz" lIns="91440" tIns="45720" rIns="91440" bIns="45720" rtlCol="0"/>
-          <a:lstStyle/>
-          <a:p>
-            <a:pPr lvl="0"/>
-            <a:r>
-              <a:rPr lang="en-US"/>
-              <a:t>Click to edit Master text styles</a:t>
-            </a:r>
-          </a:p>
-          <a:p>
-            <a:pPr lvl="1"/>
-            <a:r>
-              <a:rPr lang="en-US"/>
-              <a:t>Second level</a:t>
-            </a:r>
-          </a:p>
-          <a:p>
-            <a:pPr lvl="2"/>
-            <a:r>
-              <a:rPr lang="en-US"/>
-              <a:t>Third level</a:t>
-            </a:r>
-          </a:p>
-          <a:p>
-            <a:pPr lvl="3"/>
-            <a:r>
-              <a:rPr lang="en-US"/>
-              <a:t>Fourth level</a:t>
-            </a:r>
-          </a:p>
-          <a:p>
-            <a:pPr lvl="4"/>
-            <a:r>
-              <a:rPr lang="en-US"/>
-              <a:t>Fifth level</a:t>
-            </a:r>
-          </a:p>
-        </p:txBody>
-      </p:sp>
-      <p:sp>
-        <p:nvSpPr>
-          <p:cNvPr id="6" name="Footer Placeholder 5"/>
-          <p:cNvSpPr>
-            <a:spLocks noGrp="1"/>
-          </p:cNvSpPr>
-          <p:nvPr>
-            <p:ph type="ftr" sz="quarter" idx="4"/>
-          </p:nvPr>
-        </p:nvSpPr>
-        <p:spPr>
-          <a:xfrm>
-            <a:off x="0" y="8685213"/>
-            <a:ext cx="2971800" cy="458787"/>
-          </a:xfrm>
-          <a:prstGeom prst="rect">
-            <a:avLst/>
-          </a:prstGeom>
-        </p:spPr>
-        <p:txBody>
-          <a:bodyPr vert="horz" lIns="91440" tIns="45720" rIns="91440" bIns="45720" rtlCol="0" anchor="b"/>
-          <a:lstStyle>
-            <a:lvl1pPr algn="l">
-              <a:defRPr sz="1200"/>
-            </a:lvl1pPr>
-          </a:lstStyle>
-          <a:p>
-            <a:endParaRPr lang="en-US"/>
-          </a:p>
-        </p:txBody>
-      </p:sp>
-      <p:sp>
-        <p:nvSpPr>
-          <p:cNvPr id="7" name="Slide Number Placeholder 6"/>
-          <p:cNvSpPr>
-            <a:spLocks noGrp="1"/>
-          </p:cNvSpPr>
-          <p:nvPr>
-            <p:ph type="sldNum" sz="quarter" idx="5"/>
-          </p:nvPr>
-        </p:nvSpPr>
-        <p:spPr>
-          <a:xfrm>
-            <a:off x="3884613" y="8685213"/>
-            <a:ext cx="2971800" cy="458787"/>
-          </a:xfrm>
-          <a:prstGeom prst="rect">
-            <a:avLst/>
-          </a:prstGeom>
-        </p:spPr>
-        <p:txBody>
-          <a:bodyPr vert="horz" lIns="91440" tIns="45720" rIns="91440" bIns="45720" rtlCol="0" anchor="b"/>
-          <a:lstStyle>
-            <a:lvl1pPr algn="r">
-              <a:defRPr sz="1200"/>
-            </a:lvl1pPr>
-          </a:lstStyle>
-          <a:p>
-            <a:fld id="{CE5E9CC1-C706-0F49-92D6-E571CC5EEA8F}" type="slidenum">
-              <a:rPr lang="en-US"/>
-              <a:t>‹#›</a:t>
-            </a:fld>
-            <a:endParaRPr lang="en-US"/>
-          </a:p>
-        </p:txBody>
-      </p:sp>
     </p:spTree>
     <p:extLst>
       <p:ext uri="{BB962C8B-B14F-4D97-AF65-F5344CB8AC3E}">
-        <p14:creationId xmlns:p14="http://schemas.microsoft.com/office/powerpoint/2010/main" val="1024086991"/>
+        <p14:creationId xmlns:p14="http://schemas.microsoft.com/office/powerpoint/2010/main" val="287281412"/>
       </p:ext>
     </p:extLst>
   </p:cSld>
@@ -506,10 +287,6 @@
           <a:bodyPr/>
           <a:lstStyle/>
           <a:p>
-            <a:r>
-              <a:rPr lang="en-US" dirty="0"/>
-              <a:t/>
-            </a:r>
             <a:endParaRPr lang="en-US" dirty="0"/>
           </a:p>
         </p:txBody>
@@ -594,10 +371,6 @@
           <a:bodyPr/>
           <a:lstStyle/>
           <a:p>
-            <a:r>
-              <a:rPr lang="en-US" dirty="0"/>
-              <a:t/>
-            </a:r>
             <a:endParaRPr lang="en-US" dirty="0"/>
           </a:p>
         </p:txBody>
@@ -682,10 +455,6 @@
           <a:bodyPr/>
           <a:lstStyle/>
           <a:p>
-            <a:r>
-              <a:rPr lang="en-US" dirty="0"/>
-              <a:t/>
-            </a:r>
             <a:endParaRPr lang="en-US" dirty="0"/>
           </a:p>
         </p:txBody>
@@ -770,10 +539,6 @@
           <a:bodyPr/>
           <a:lstStyle/>
           <a:p>
-            <a:r>
-              <a:rPr lang="en-US" dirty="0"/>
-              <a:t/>
-            </a:r>
             <a:endParaRPr lang="en-US" dirty="0"/>
           </a:p>
         </p:txBody>
@@ -858,10 +623,6 @@
           <a:bodyPr/>
           <a:lstStyle/>
           <a:p>
-            <a:r>
-              <a:rPr lang="en-US" dirty="0"/>
-              <a:t/>
-            </a:r>
             <a:endParaRPr lang="en-US" dirty="0"/>
           </a:p>
         </p:txBody>
@@ -946,10 +707,6 @@
           <a:bodyPr/>
           <a:lstStyle/>
           <a:p>
-            <a:r>
-              <a:rPr lang="en-US" dirty="0"/>
-              <a:t/>
-            </a:r>
             <a:endParaRPr lang="en-US" dirty="0"/>
           </a:p>
         </p:txBody>
@@ -1034,10 +791,6 @@
           <a:bodyPr/>
           <a:lstStyle/>
           <a:p>
-            <a:r>
-              <a:rPr lang="en-US" dirty="0"/>
-              <a:t/>
-            </a:r>
             <a:endParaRPr lang="en-US" dirty="0"/>
           </a:p>
         </p:txBody>
@@ -1116,6 +869,7 @@
         <a:solidFill>
           <a:srgbClr val="F6FAFC"/>
         </a:solidFill>
+        <a:effectLst/>
       </p:bgPr>
     </p:bg>
     <p:spTree>
@@ -1175,7 +929,7 @@
           </a:prstGeom>
           <a:extLst>
             <a:ext uri="{C572A759-6A51-4108-AA02-DFA0A04FC94B}">
-              <ma14:wrappingTextBoxFlag xmlns:ma14="http://schemas.microsoft.com/office/mac/drawingml/2011/main" val="0"/>
+              <ma14:wrappingTextBoxFlag xmlns:ma14="http://schemas.microsoft.com/office/mac/drawingml/2011/main" xmlns="" val="0"/>
             </a:ext>
           </a:extLst>
         </p:spPr>
@@ -1196,8 +950,8 @@
           <a:p>
             <a:pPr algn="l"/>
             <a:fld id="{F7021451-1387-4CA6-816F-3879F97B5CBC}" type="slidenum">
-              <a:rPr b="0" lang="en-US"/>
-              <a:t>1002</a:t>
+              <a:rPr lang="en-US" b="0"/>
+              <a:t>‹#›</a:t>
             </a:fld>
             <a:endParaRPr lang="en-US"/>
           </a:p>
@@ -1214,6 +968,11 @@
 <file path=ppt/slideMasters/slideMaster1.xml><?xml version="1.0" encoding="utf-8"?>
 <p:sldMaster xmlns:a="http://schemas.openxmlformats.org/drawingml/2006/main" xmlns:r="http://schemas.openxmlformats.org/officeDocument/2006/relationships" xmlns:p="http://schemas.openxmlformats.org/presentationml/2006/main">
   <p:cSld>
+    <p:bg>
+      <p:bgRef idx="1001">
+        <a:schemeClr val="bg1"/>
+      </p:bgRef>
+    </p:bg>
     <p:spTree>
       <p:nvGrpSpPr>
         <p:cNvPr id="1" name=""/>
@@ -1248,7 +1007,7 @@
           </a:prstGeom>
           <a:extLst>
             <a:ext uri="{C572A759-6A51-4108-AA02-DFA0A04FC94B}">
-              <ma14:wrappingTextBoxFlag xmlns:ma14="http://schemas.microsoft.com/office/mac/drawingml/2011/main" val="0"/>
+              <ma14:wrappingTextBoxFlag xmlns:ma14="http://schemas.microsoft.com/office/mac/drawingml/2011/main" xmlns="" val="0"/>
             </a:ext>
           </a:extLst>
         </p:spPr>
@@ -1269,8 +1028,8 @@
           <a:p>
             <a:pPr algn="l"/>
             <a:fld id="{F7021451-1387-4CA6-816F-3879F97B5CBC}" type="slidenum">
-              <a:rPr b="0" lang="en-US"/>
-              <a:t>null</a:t>
+              <a:rPr lang="en-US" b="0"/>
+              <a:t>‹#›</a:t>
             </a:fld>
             <a:endParaRPr lang="en-US"/>
           </a:p>
@@ -1545,6 +1304,7 @@
         <a:solidFill>
           <a:srgbClr val="173650"/>
         </a:solidFill>
+        <a:effectLst/>
       </p:bgPr>
     </p:bg>
     <p:spTree>
@@ -1609,11 +1369,11 @@
           </a:bodyPr>
           <a:lstStyle/>
           <a:p>
-            <a:pPr algn="l" indent="0" marL="0">
-              <a:buNone/>
-            </a:pPr>
-            <a:r>
-              <a:rPr lang="en-US" sz="1100" b="1" spc="150" kern="0" dirty="0">
+            <a:pPr marL="0" indent="0" algn="l">
+              <a:buNone/>
+            </a:pPr>
+            <a:r>
+              <a:rPr lang="en-US" sz="1100" b="1" kern="0" spc="150" dirty="0">
                 <a:solidFill>
                   <a:srgbClr val="8ED6CB"/>
                 </a:solidFill>
@@ -1650,7 +1410,7 @@
           </a:bodyPr>
           <a:lstStyle/>
           <a:p>
-            <a:pPr algn="l" indent="0" marL="0">
+            <a:pPr marL="0" indent="0" algn="l">
               <a:buNone/>
             </a:pPr>
             <a:r>
@@ -1691,7 +1451,7 @@
           </a:bodyPr>
           <a:lstStyle/>
           <a:p>
-            <a:pPr algn="l" indent="0" marL="0">
+            <a:pPr marL="0" indent="0" algn="l">
               <a:buNone/>
             </a:pPr>
             <a:r>
@@ -1732,7 +1492,7 @@
           </a:bodyPr>
           <a:lstStyle/>
           <a:p>
-            <a:pPr algn="l" indent="0" marL="0">
+            <a:pPr marL="0" indent="0" algn="l">
               <a:buNone/>
             </a:pPr>
             <a:r>
@@ -1798,7 +1558,7 @@
           </a:bodyPr>
           <a:lstStyle/>
           <a:p>
-            <a:pPr algn="l" indent="0" marL="0">
+            <a:pPr marL="0" indent="0" algn="l">
               <a:buNone/>
             </a:pPr>
             <a:r>
@@ -1839,7 +1599,7 @@
           </a:bodyPr>
           <a:lstStyle/>
           <a:p>
-            <a:pPr algn="l" indent="0" marL="0">
+            <a:pPr marL="0" indent="0" algn="l">
               <a:buNone/>
             </a:pPr>
             <a:r>
@@ -1907,7 +1667,7 @@
           </a:bodyPr>
           <a:lstStyle/>
           <a:p>
-            <a:pPr algn="ctr" indent="0" marL="0">
+            <a:pPr marL="0" indent="0" algn="ctr">
               <a:buNone/>
             </a:pPr>
             <a:r>
@@ -1975,7 +1735,7 @@
           </a:bodyPr>
           <a:lstStyle/>
           <a:p>
-            <a:pPr algn="ctr" indent="0" marL="0">
+            <a:pPr marL="0" indent="0" algn="ctr">
               <a:buNone/>
             </a:pPr>
             <a:r>
@@ -2043,7 +1803,7 @@
           </a:bodyPr>
           <a:lstStyle/>
           <a:p>
-            <a:pPr algn="ctr" indent="0" marL="0">
+            <a:pPr marL="0" indent="0" algn="ctr">
               <a:buNone/>
             </a:pPr>
             <a:r>
@@ -2111,7 +1871,7 @@
           </a:bodyPr>
           <a:lstStyle/>
           <a:p>
-            <a:pPr algn="ctr" indent="0" marL="0">
+            <a:pPr marL="0" indent="0" algn="ctr">
               <a:buNone/>
             </a:pPr>
             <a:r>
@@ -2179,7 +1939,7 @@
           </a:bodyPr>
           <a:lstStyle/>
           <a:p>
-            <a:pPr algn="ctr" indent="0" marL="0">
+            <a:pPr marL="0" indent="0" algn="ctr">
               <a:buNone/>
             </a:pPr>
             <a:r>
@@ -2247,7 +2007,7 @@
           </a:bodyPr>
           <a:lstStyle/>
           <a:p>
-            <a:pPr algn="ctr" indent="0" marL="0">
+            <a:pPr marL="0" indent="0" algn="ctr">
               <a:buNone/>
             </a:pPr>
             <a:r>
@@ -2315,7 +2075,7 @@
           </a:bodyPr>
           <a:lstStyle/>
           <a:p>
-            <a:pPr algn="ctr" indent="0" marL="0">
+            <a:pPr marL="0" indent="0" algn="ctr">
               <a:buNone/>
             </a:pPr>
             <a:r>
@@ -2383,7 +2143,7 @@
           </a:bodyPr>
           <a:lstStyle/>
           <a:p>
-            <a:pPr algn="ctr" indent="0" marL="0">
+            <a:pPr marL="0" indent="0" algn="ctr">
               <a:buNone/>
             </a:pPr>
             <a:r>
@@ -2451,7 +2211,7 @@
           </a:bodyPr>
           <a:lstStyle/>
           <a:p>
-            <a:pPr algn="ctr" indent="0" marL="0">
+            <a:pPr marL="0" indent="0" algn="ctr">
               <a:buNone/>
             </a:pPr>
             <a:r>
@@ -2519,7 +2279,7 @@
           </a:bodyPr>
           <a:lstStyle/>
           <a:p>
-            <a:pPr algn="ctr" indent="0" marL="0">
+            <a:pPr marL="0" indent="0" algn="ctr">
               <a:buNone/>
             </a:pPr>
             <a:r>
@@ -2587,7 +2347,7 @@
           </a:bodyPr>
           <a:lstStyle/>
           <a:p>
-            <a:pPr algn="ctr" indent="0" marL="0">
+            <a:pPr marL="0" indent="0" algn="ctr">
               <a:buNone/>
             </a:pPr>
             <a:r>
@@ -2655,7 +2415,7 @@
           </a:bodyPr>
           <a:lstStyle/>
           <a:p>
-            <a:pPr algn="ctr" indent="0" marL="0">
+            <a:pPr marL="0" indent="0" algn="ctr">
               <a:buNone/>
             </a:pPr>
             <a:r>
@@ -2723,7 +2483,7 @@
           </a:bodyPr>
           <a:lstStyle/>
           <a:p>
-            <a:pPr algn="ctr" indent="0" marL="0">
+            <a:pPr marL="0" indent="0" algn="ctr">
               <a:buNone/>
             </a:pPr>
             <a:r>
@@ -2789,7 +2549,7 @@
           </a:bodyPr>
           <a:lstStyle/>
           <a:p>
-            <a:pPr algn="ctr" indent="0" marL="0">
+            <a:pPr marL="0" indent="0" algn="ctr">
               <a:buNone/>
             </a:pPr>
             <a:r>
@@ -2855,7 +2615,7 @@
           </a:bodyPr>
           <a:lstStyle/>
           <a:p>
-            <a:pPr algn="ctr" indent="0" marL="0">
+            <a:pPr marL="0" indent="0" algn="ctr">
               <a:buNone/>
             </a:pPr>
             <a:r>
@@ -2896,7 +2656,7 @@
           </a:bodyPr>
           <a:lstStyle/>
           <a:p>
-            <a:pPr algn="ctr" indent="0" marL="0">
+            <a:pPr marL="0" indent="0" algn="ctr">
               <a:buNone/>
             </a:pPr>
             <a:r>
@@ -2916,7 +2676,7 @@
       </p:sp>
       <p:sp>
         <p:nvSpPr>
-          <p:cNvPr id="25" name="Slide Number Placeholder 0"/>
+          <p:cNvPr id="41" name="Slide Number Placeholder 0"/>
           <p:cNvSpPr>
             <a:spLocks noGrp="1"/>
           </p:cNvSpPr>
@@ -2934,7 +2694,7 @@
           </a:prstGeom>
           <a:extLst>
             <a:ext uri="{C572A759-6A51-4108-AA02-DFA0A04FC94B}">
-              <ma14:wrappingTextBoxFlag xmlns:ma14="http://schemas.microsoft.com/office/mac/drawingml/2011/main" val="0"/>
+              <ma14:wrappingTextBoxFlag xmlns:ma14="http://schemas.microsoft.com/office/mac/drawingml/2011/main" xmlns="" val="0"/>
             </a:ext>
           </a:extLst>
         </p:spPr>
@@ -2955,7 +2715,7 @@
           <a:p>
             <a:pPr algn="l"/>
             <a:fld id="{F7021451-1387-4CA6-816F-3879F97B5CBC}" type="slidenum">
-              <a:rPr b="0" lang="en-US"/>
+              <a:rPr lang="en-US" b="0"/>
               <a:t>1</a:t>
             </a:fld>
             <a:endParaRPr lang="en-US"/>
@@ -3010,11 +2770,11 @@
           </a:bodyPr>
           <a:lstStyle/>
           <a:p>
-            <a:pPr algn="l" indent="0" marL="0">
-              <a:buNone/>
-            </a:pPr>
-            <a:r>
-              <a:rPr lang="en-US" sz="900" b="1" spc="120" kern="0" dirty="0">
+            <a:pPr marL="0" indent="0" algn="l">
+              <a:buNone/>
+            </a:pPr>
+            <a:r>
+              <a:rPr lang="en-US" sz="900" b="1" kern="0" spc="120" dirty="0">
                 <a:solidFill>
                   <a:srgbClr val="16766F"/>
                 </a:solidFill>
@@ -3051,7 +2811,7 @@
           </a:bodyPr>
           <a:lstStyle/>
           <a:p>
-            <a:pPr algn="l" indent="0" marL="0">
+            <a:pPr marL="0" indent="0" algn="l">
               <a:buNone/>
             </a:pPr>
             <a:r>
@@ -3092,7 +2852,7 @@
           </a:bodyPr>
           <a:lstStyle/>
           <a:p>
-            <a:pPr algn="l" indent="0" marL="0">
+            <a:pPr marL="0" indent="0" algn="l">
               <a:buNone/>
             </a:pPr>
             <a:r>
@@ -3160,7 +2920,7 @@
           </a:bodyPr>
           <a:lstStyle/>
           <a:p>
-            <a:pPr algn="l" indent="0" marL="0">
+            <a:pPr marL="0" indent="0" algn="l">
               <a:buNone/>
             </a:pPr>
             <a:r>
@@ -3201,7 +2961,7 @@
           </a:bodyPr>
           <a:lstStyle/>
           <a:p>
-            <a:pPr algn="l" indent="0" marL="0">
+            <a:pPr marL="0" indent="0" algn="l">
               <a:buNone/>
             </a:pPr>
             <a:r>
@@ -3218,7 +2978,7 @@
             <a:endParaRPr lang="en-US" sz="1900" dirty="0"/>
           </a:p>
           <a:p>
-            <a:pPr algn="l" indent="0" marL="0">
+            <a:pPr marL="0" indent="0" algn="l">
               <a:buNone/>
             </a:pPr>
             <a:r>
@@ -3284,7 +3044,7 @@
           </a:bodyPr>
           <a:lstStyle/>
           <a:p>
-            <a:pPr algn="l" indent="0" marL="0">
+            <a:pPr marL="0" indent="0" algn="l">
               <a:buNone/>
             </a:pPr>
             <a:r>
@@ -3301,7 +3061,7 @@
             <a:endParaRPr lang="en-US" sz="1500" dirty="0"/>
           </a:p>
           <a:p>
-            <a:pPr algn="l" indent="0" marL="0">
+            <a:pPr marL="0" indent="0" algn="l">
               <a:buNone/>
             </a:pPr>
             <a:r>
@@ -3342,7 +3102,7 @@
           </a:bodyPr>
           <a:lstStyle/>
           <a:p>
-            <a:pPr algn="l" indent="0" marL="0">
+            <a:pPr marL="0" indent="0" algn="l">
               <a:buNone/>
             </a:pPr>
             <a:r>
@@ -3410,7 +3170,7 @@
           </a:bodyPr>
           <a:lstStyle/>
           <a:p>
-            <a:pPr algn="l" indent="0" marL="0">
+            <a:pPr marL="0" indent="0" algn="l">
               <a:buNone/>
             </a:pPr>
             <a:r>
@@ -3451,7 +3211,7 @@
           </a:bodyPr>
           <a:lstStyle/>
           <a:p>
-            <a:pPr algn="l" indent="0" marL="0">
+            <a:pPr marL="0" indent="0" algn="l">
               <a:buNone/>
             </a:pPr>
             <a:r>
@@ -3492,7 +3252,7 @@
           </a:bodyPr>
           <a:lstStyle/>
           <a:p>
-            <a:pPr algn="l" indent="0" marL="0">
+            <a:pPr marL="0" indent="0" algn="l">
               <a:buNone/>
             </a:pPr>
             <a:r>
@@ -3560,7 +3320,7 @@
           </a:bodyPr>
           <a:lstStyle/>
           <a:p>
-            <a:pPr algn="l" indent="0" marL="0">
+            <a:pPr marL="0" indent="0" algn="l">
               <a:buNone/>
             </a:pPr>
             <a:r>
@@ -3601,7 +3361,7 @@
           </a:bodyPr>
           <a:lstStyle/>
           <a:p>
-            <a:pPr algn="l" indent="0" marL="0">
+            <a:pPr marL="0" indent="0" algn="l">
               <a:buNone/>
             </a:pPr>
             <a:r>
@@ -3642,7 +3402,7 @@
           </a:bodyPr>
           <a:lstStyle/>
           <a:p>
-            <a:pPr algn="l" indent="0" marL="0">
+            <a:pPr marL="0" indent="0" algn="l">
               <a:buNone/>
             </a:pPr>
             <a:r>
@@ -3710,7 +3470,7 @@
           </a:bodyPr>
           <a:lstStyle/>
           <a:p>
-            <a:pPr algn="l" indent="0" marL="0">
+            <a:pPr marL="0" indent="0" algn="l">
               <a:buNone/>
             </a:pPr>
             <a:r>
@@ -3751,7 +3511,7 @@
           </a:bodyPr>
           <a:lstStyle/>
           <a:p>
-            <a:pPr algn="l" indent="0" marL="0">
+            <a:pPr marL="0" indent="0" algn="l">
               <a:buNone/>
             </a:pPr>
             <a:r>
@@ -3792,7 +3552,7 @@
           </a:bodyPr>
           <a:lstStyle/>
           <a:p>
-            <a:pPr algn="l" indent="0" marL="0">
+            <a:pPr marL="0" indent="0" algn="l">
               <a:buNone/>
             </a:pPr>
             <a:r>
@@ -3860,7 +3620,7 @@
           </a:bodyPr>
           <a:lstStyle/>
           <a:p>
-            <a:pPr algn="l" indent="0" marL="0">
+            <a:pPr marL="0" indent="0" algn="l">
               <a:buNone/>
             </a:pPr>
             <a:r>
@@ -3901,7 +3661,7 @@
           </a:bodyPr>
           <a:lstStyle/>
           <a:p>
-            <a:pPr algn="l" indent="0" marL="0">
+            <a:pPr marL="0" indent="0" algn="l">
               <a:buNone/>
             </a:pPr>
             <a:r>
@@ -3942,7 +3702,7 @@
           </a:bodyPr>
           <a:lstStyle/>
           <a:p>
-            <a:pPr algn="l" indent="0" marL="0">
+            <a:pPr marL="0" indent="0" algn="l">
               <a:buNone/>
             </a:pPr>
             <a:r>
@@ -4010,7 +3770,7 @@
           </a:bodyPr>
           <a:lstStyle/>
           <a:p>
-            <a:pPr algn="l" indent="0" marL="0">
+            <a:pPr marL="0" indent="0" algn="l">
               <a:buNone/>
             </a:pPr>
             <a:r>
@@ -4051,7 +3811,7 @@
           </a:bodyPr>
           <a:lstStyle/>
           <a:p>
-            <a:pPr algn="l" indent="0" marL="0">
+            <a:pPr marL="0" indent="0" algn="l">
               <a:buNone/>
             </a:pPr>
             <a:r>
@@ -4071,7 +3831,7 @@
       </p:sp>
       <p:sp>
         <p:nvSpPr>
-          <p:cNvPr id="25" name="Slide Number Placeholder 0"/>
+          <p:cNvPr id="30" name="Slide Number Placeholder 0"/>
           <p:cNvSpPr>
             <a:spLocks noGrp="1"/>
           </p:cNvSpPr>
@@ -4089,7 +3849,7 @@
           </a:prstGeom>
           <a:extLst>
             <a:ext uri="{C572A759-6A51-4108-AA02-DFA0A04FC94B}">
-              <ma14:wrappingTextBoxFlag xmlns:ma14="http://schemas.microsoft.com/office/mac/drawingml/2011/main" val="0"/>
+              <ma14:wrappingTextBoxFlag xmlns:ma14="http://schemas.microsoft.com/office/mac/drawingml/2011/main" xmlns="" val="0"/>
             </a:ext>
           </a:extLst>
         </p:spPr>
@@ -4110,7 +3870,7 @@
           <a:p>
             <a:pPr algn="l"/>
             <a:fld id="{F7021451-1387-4CA6-816F-3879F97B5CBC}" type="slidenum">
-              <a:rPr b="0" lang="en-US"/>
+              <a:rPr lang="en-US" b="0"/>
               <a:t>2</a:t>
             </a:fld>
             <a:endParaRPr lang="en-US"/>
@@ -4165,11 +3925,11 @@
           </a:bodyPr>
           <a:lstStyle/>
           <a:p>
-            <a:pPr algn="l" indent="0" marL="0">
-              <a:buNone/>
-            </a:pPr>
-            <a:r>
-              <a:rPr lang="en-US" sz="900" b="1" spc="120" kern="0" dirty="0">
+            <a:pPr marL="0" indent="0" algn="l">
+              <a:buNone/>
+            </a:pPr>
+            <a:r>
+              <a:rPr lang="en-US" sz="900" b="1" kern="0" spc="120" dirty="0">
                 <a:solidFill>
                   <a:srgbClr val="16766F"/>
                 </a:solidFill>
@@ -4206,7 +3966,7 @@
           </a:bodyPr>
           <a:lstStyle/>
           <a:p>
-            <a:pPr algn="l" indent="0" marL="0">
+            <a:pPr marL="0" indent="0" algn="l">
               <a:buNone/>
             </a:pPr>
             <a:r>
@@ -4247,7 +4007,7 @@
           </a:bodyPr>
           <a:lstStyle/>
           <a:p>
-            <a:pPr algn="l" indent="0" marL="0">
+            <a:pPr marL="0" indent="0" algn="l">
               <a:buNone/>
             </a:pPr>
             <a:r>
@@ -4315,7 +4075,7 @@
           </a:bodyPr>
           <a:lstStyle/>
           <a:p>
-            <a:pPr algn="l" indent="0" marL="0">
+            <a:pPr marL="0" indent="0" algn="l">
               <a:buNone/>
             </a:pPr>
             <a:r>
@@ -4356,7 +4116,7 @@
           </a:bodyPr>
           <a:lstStyle/>
           <a:p>
-            <a:pPr algn="l" indent="0" marL="0">
+            <a:pPr marL="0" indent="0" algn="l">
               <a:buNone/>
             </a:pPr>
             <a:r>
@@ -4397,7 +4157,7 @@
           </a:bodyPr>
           <a:lstStyle/>
           <a:p>
-            <a:pPr algn="l" indent="0" marL="0">
+            <a:pPr marL="0" indent="0" algn="l">
               <a:buNone/>
             </a:pPr>
             <a:r>
@@ -4465,7 +4225,7 @@
           </a:bodyPr>
           <a:lstStyle/>
           <a:p>
-            <a:pPr algn="l" indent="0" marL="0">
+            <a:pPr marL="0" indent="0" algn="l">
               <a:buNone/>
             </a:pPr>
             <a:r>
@@ -4506,7 +4266,7 @@
           </a:bodyPr>
           <a:lstStyle/>
           <a:p>
-            <a:pPr algn="l" indent="0" marL="0">
+            <a:pPr marL="0" indent="0" algn="l">
               <a:buNone/>
             </a:pPr>
             <a:r>
@@ -4547,7 +4307,7 @@
           </a:bodyPr>
           <a:lstStyle/>
           <a:p>
-            <a:pPr algn="l" indent="0" marL="0">
+            <a:pPr marL="0" indent="0" algn="l">
               <a:buNone/>
             </a:pPr>
             <a:r>
@@ -4615,7 +4375,7 @@
           </a:bodyPr>
           <a:lstStyle/>
           <a:p>
-            <a:pPr algn="l" indent="0" marL="0">
+            <a:pPr marL="0" indent="0" algn="l">
               <a:buNone/>
             </a:pPr>
             <a:r>
@@ -4656,7 +4416,7 @@
           </a:bodyPr>
           <a:lstStyle/>
           <a:p>
-            <a:pPr algn="l" indent="0" marL="0">
+            <a:pPr marL="0" indent="0" algn="l">
               <a:buNone/>
             </a:pPr>
             <a:r>
@@ -4697,7 +4457,7 @@
           </a:bodyPr>
           <a:lstStyle/>
           <a:p>
-            <a:pPr algn="l" indent="0" marL="0">
+            <a:pPr marL="0" indent="0" algn="l">
               <a:buNone/>
             </a:pPr>
             <a:r>
@@ -4765,7 +4525,7 @@
           </a:bodyPr>
           <a:lstStyle/>
           <a:p>
-            <a:pPr algn="ctr" indent="0" marL="0">
+            <a:pPr marL="0" indent="0" algn="ctr">
               <a:buNone/>
             </a:pPr>
             <a:r>
@@ -4803,7 +4563,7 @@
           </a:prstGeom>
           <a:extLst>
             <a:ext uri="{C572A759-6A51-4108-AA02-DFA0A04FC94B}">
-              <ma14:wrappingTextBoxFlag xmlns:ma14="http://schemas.microsoft.com/office/mac/drawingml/2011/main" val="0"/>
+              <ma14:wrappingTextBoxFlag xmlns:ma14="http://schemas.microsoft.com/office/mac/drawingml/2011/main" xmlns="" val="0"/>
             </a:ext>
           </a:extLst>
         </p:spPr>
@@ -4824,7 +4584,7 @@
           <a:p>
             <a:pPr algn="l"/>
             <a:fld id="{F7021451-1387-4CA6-816F-3879F97B5CBC}" type="slidenum">
-              <a:rPr b="0" lang="en-US"/>
+              <a:rPr lang="en-US" b="0"/>
               <a:t>3</a:t>
             </a:fld>
             <a:endParaRPr lang="en-US"/>
@@ -4879,11 +4639,11 @@
           </a:bodyPr>
           <a:lstStyle/>
           <a:p>
-            <a:pPr algn="l" indent="0" marL="0">
-              <a:buNone/>
-            </a:pPr>
-            <a:r>
-              <a:rPr lang="en-US" sz="900" b="1" spc="120" kern="0" dirty="0">
+            <a:pPr marL="0" indent="0" algn="l">
+              <a:buNone/>
+            </a:pPr>
+            <a:r>
+              <a:rPr lang="en-US" sz="900" b="1" kern="0" spc="120" dirty="0">
                 <a:solidFill>
                   <a:srgbClr val="16766F"/>
                 </a:solidFill>
@@ -4920,7 +4680,7 @@
           </a:bodyPr>
           <a:lstStyle/>
           <a:p>
-            <a:pPr algn="l" indent="0" marL="0">
+            <a:pPr marL="0" indent="0" algn="l">
               <a:buNone/>
             </a:pPr>
             <a:r>
@@ -4961,7 +4721,7 @@
           </a:bodyPr>
           <a:lstStyle/>
           <a:p>
-            <a:pPr algn="l" indent="0" marL="0">
+            <a:pPr marL="0" indent="0" algn="l">
               <a:buNone/>
             </a:pPr>
             <a:r>
@@ -5029,7 +4789,7 @@
           </a:bodyPr>
           <a:lstStyle/>
           <a:p>
-            <a:pPr algn="l" indent="0" marL="0">
+            <a:pPr marL="0" indent="0" algn="l">
               <a:buNone/>
             </a:pPr>
             <a:r>
@@ -5097,7 +4857,7 @@
           </a:bodyPr>
           <a:lstStyle/>
           <a:p>
-            <a:pPr algn="ctr" indent="0" marL="0">
+            <a:pPr marL="0" indent="0" algn="ctr">
               <a:buNone/>
             </a:pPr>
             <a:r>
@@ -5138,7 +4898,7 @@
           </a:bodyPr>
           <a:lstStyle/>
           <a:p>
-            <a:pPr algn="l" indent="0" marL="0">
+            <a:pPr marL="0" indent="0" algn="l">
               <a:buNone/>
             </a:pPr>
             <a:r>
@@ -5155,7 +4915,7 @@
             <a:endParaRPr lang="en-US" sz="1500" dirty="0"/>
           </a:p>
           <a:p>
-            <a:pPr algn="l" indent="0" marL="0">
+            <a:pPr marL="0" indent="0" algn="l">
               <a:buNone/>
             </a:pPr>
             <a:r>
@@ -5223,7 +4983,7 @@
           </a:bodyPr>
           <a:lstStyle/>
           <a:p>
-            <a:pPr algn="ctr" indent="0" marL="0">
+            <a:pPr marL="0" indent="0" algn="ctr">
               <a:buNone/>
             </a:pPr>
             <a:r>
@@ -5264,7 +5024,7 @@
           </a:bodyPr>
           <a:lstStyle/>
           <a:p>
-            <a:pPr algn="l" indent="0" marL="0">
+            <a:pPr marL="0" indent="0" algn="l">
               <a:buNone/>
             </a:pPr>
             <a:r>
@@ -5281,7 +5041,7 @@
             <a:endParaRPr lang="en-US" sz="1400" dirty="0"/>
           </a:p>
           <a:p>
-            <a:pPr algn="l" indent="0" marL="0">
+            <a:pPr marL="0" indent="0" algn="l">
               <a:buNone/>
             </a:pPr>
             <a:r>
@@ -5347,7 +5107,7 @@
           </a:bodyPr>
           <a:lstStyle/>
           <a:p>
-            <a:pPr algn="l" indent="0" marL="0">
+            <a:pPr marL="0" indent="0" algn="l">
               <a:buNone/>
             </a:pPr>
             <a:r>
@@ -5364,7 +5124,7 @@
             <a:endParaRPr lang="en-US" sz="1250" dirty="0"/>
           </a:p>
           <a:p>
-            <a:pPr algn="l" indent="0" marL="0">
+            <a:pPr marL="0" indent="0" algn="l">
               <a:buNone/>
             </a:pPr>
             <a:r>
@@ -5381,7 +5141,7 @@
             <a:endParaRPr lang="en-US" sz="1250" dirty="0"/>
           </a:p>
           <a:p>
-            <a:pPr algn="l" indent="0" marL="0">
+            <a:pPr marL="0" indent="0" algn="l">
               <a:buNone/>
             </a:pPr>
             <a:r>
@@ -5449,7 +5209,7 @@
           </a:bodyPr>
           <a:lstStyle/>
           <a:p>
-            <a:pPr algn="l" indent="0" marL="0">
+            <a:pPr marL="0" indent="0" algn="l">
               <a:buNone/>
             </a:pPr>
             <a:r>
@@ -5469,14 +5229,14 @@
       </p:sp>
       <p:pic>
         <p:nvPicPr>
-          <p:cNvPr id="17" name="Image 0" descr="D:\大三上小学期\机器学习综合实践\ml-project\reports\M1证据_数据清洗与分组.png">    </p:cNvPr>
+          <p:cNvPr id="17" name="Image 0" descr="D:\大三上小学期\机器学习综合实践\ml-project\reports\M1证据_数据清洗与分组.png"/>
           <p:cNvPicPr>
             <a:picLocks noChangeAspect="1"/>
           </p:cNvPicPr>
           <p:nvPr/>
         </p:nvPicPr>
         <p:blipFill>
-          <a:blip r:embed="rId1"/>
+          <a:blip r:embed="rId3"/>
           <a:stretch>
             <a:fillRect/>
           </a:stretch>
@@ -5514,7 +5274,7 @@
           </a:bodyPr>
           <a:lstStyle/>
           <a:p>
-            <a:pPr algn="l" indent="0" marL="0">
+            <a:pPr marL="0" indent="0" algn="l">
               <a:buNone/>
             </a:pPr>
             <a:r>
@@ -5552,7 +5312,7 @@
           </a:prstGeom>
           <a:extLst>
             <a:ext uri="{C572A759-6A51-4108-AA02-DFA0A04FC94B}">
-              <ma14:wrappingTextBoxFlag xmlns:ma14="http://schemas.microsoft.com/office/mac/drawingml/2011/main" val="0"/>
+              <ma14:wrappingTextBoxFlag xmlns:ma14="http://schemas.microsoft.com/office/mac/drawingml/2011/main" xmlns="" val="0"/>
             </a:ext>
           </a:extLst>
         </p:spPr>
@@ -5573,7 +5333,7 @@
           <a:p>
             <a:pPr algn="l"/>
             <a:fld id="{F7021451-1387-4CA6-816F-3879F97B5CBC}" type="slidenum">
-              <a:rPr b="0" lang="en-US"/>
+              <a:rPr lang="en-US" b="0"/>
               <a:t>4</a:t>
             </a:fld>
             <a:endParaRPr lang="en-US"/>
@@ -5628,11 +5388,11 @@
           </a:bodyPr>
           <a:lstStyle/>
           <a:p>
-            <a:pPr algn="l" indent="0" marL="0">
-              <a:buNone/>
-            </a:pPr>
-            <a:r>
-              <a:rPr lang="en-US" sz="900" b="1" spc="120" kern="0" dirty="0">
+            <a:pPr marL="0" indent="0" algn="l">
+              <a:buNone/>
+            </a:pPr>
+            <a:r>
+              <a:rPr lang="en-US" sz="900" b="1" kern="0" spc="120" dirty="0">
                 <a:solidFill>
                   <a:srgbClr val="16766F"/>
                 </a:solidFill>
@@ -5669,7 +5429,7 @@
           </a:bodyPr>
           <a:lstStyle/>
           <a:p>
-            <a:pPr algn="l" indent="0" marL="0">
+            <a:pPr marL="0" indent="0" algn="l">
               <a:buNone/>
             </a:pPr>
             <a:r>
@@ -5710,7 +5470,7 @@
           </a:bodyPr>
           <a:lstStyle/>
           <a:p>
-            <a:pPr algn="l" indent="0" marL="0">
+            <a:pPr marL="0" indent="0" algn="l">
               <a:buNone/>
             </a:pPr>
             <a:r>
@@ -5778,7 +5538,7 @@
           </a:bodyPr>
           <a:lstStyle/>
           <a:p>
-            <a:pPr algn="l" indent="0" marL="0">
+            <a:pPr marL="0" indent="0" algn="l">
               <a:buNone/>
             </a:pPr>
             <a:r>
@@ -5819,7 +5579,7 @@
           </a:bodyPr>
           <a:lstStyle/>
           <a:p>
-            <a:pPr algn="l" indent="0" marL="0">
+            <a:pPr marL="0" indent="0" algn="l">
               <a:buNone/>
             </a:pPr>
             <a:r>
@@ -5836,7 +5596,7 @@
             <a:endParaRPr lang="en-US" sz="1700" dirty="0"/>
           </a:p>
           <a:p>
-            <a:pPr algn="l" indent="0" marL="0">
+            <a:pPr marL="0" indent="0" algn="l">
               <a:buNone/>
             </a:pPr>
             <a:r>
@@ -5904,7 +5664,7 @@
           </a:bodyPr>
           <a:lstStyle/>
           <a:p>
-            <a:pPr algn="ctr" indent="0" marL="0">
+            <a:pPr marL="0" indent="0" algn="ctr">
               <a:buNone/>
             </a:pPr>
             <a:r>
@@ -5997,7 +5757,7 @@
           </a:bodyPr>
           <a:lstStyle/>
           <a:p>
-            <a:pPr algn="l" indent="0" marL="0">
+            <a:pPr marL="0" indent="0" algn="l">
               <a:buNone/>
             </a:pPr>
             <a:r>
@@ -6038,7 +5798,7 @@
           </a:bodyPr>
           <a:lstStyle/>
           <a:p>
-            <a:pPr algn="l" indent="0" marL="0">
+            <a:pPr marL="0" indent="0" algn="l">
               <a:buNone/>
             </a:pPr>
             <a:r>
@@ -6055,7 +5815,7 @@
             <a:endParaRPr lang="en-US" sz="1700" dirty="0"/>
           </a:p>
           <a:p>
-            <a:pPr algn="l" indent="0" marL="0">
+            <a:pPr marL="0" indent="0" algn="l">
               <a:buNone/>
             </a:pPr>
             <a:r>
@@ -6123,7 +5883,7 @@
           </a:bodyPr>
           <a:lstStyle/>
           <a:p>
-            <a:pPr algn="ctr" indent="0" marL="0">
+            <a:pPr marL="0" indent="0" algn="ctr">
               <a:buNone/>
             </a:pPr>
             <a:r>
@@ -6216,7 +5976,7 @@
           </a:bodyPr>
           <a:lstStyle/>
           <a:p>
-            <a:pPr algn="l" indent="0" marL="0">
+            <a:pPr marL="0" indent="0" algn="l">
               <a:buNone/>
             </a:pPr>
             <a:r>
@@ -6257,7 +6017,7 @@
           </a:bodyPr>
           <a:lstStyle/>
           <a:p>
-            <a:pPr algn="l" indent="0" marL="0">
+            <a:pPr marL="0" indent="0" algn="l">
               <a:buNone/>
             </a:pPr>
             <a:r>
@@ -6274,7 +6034,7 @@
             <a:endParaRPr lang="en-US" sz="1700" dirty="0"/>
           </a:p>
           <a:p>
-            <a:pPr algn="l" indent="0" marL="0">
+            <a:pPr marL="0" indent="0" algn="l">
               <a:buNone/>
             </a:pPr>
             <a:r>
@@ -6342,7 +6102,7 @@
           </a:bodyPr>
           <a:lstStyle/>
           <a:p>
-            <a:pPr algn="ctr" indent="0" marL="0">
+            <a:pPr marL="0" indent="0" algn="ctr">
               <a:buNone/>
             </a:pPr>
             <a:r>
@@ -6435,7 +6195,7 @@
           </a:bodyPr>
           <a:lstStyle/>
           <a:p>
-            <a:pPr algn="l" indent="0" marL="0">
+            <a:pPr marL="0" indent="0" algn="l">
               <a:buNone/>
             </a:pPr>
             <a:r>
@@ -6476,7 +6236,7 @@
           </a:bodyPr>
           <a:lstStyle/>
           <a:p>
-            <a:pPr algn="l" indent="0" marL="0">
+            <a:pPr marL="0" indent="0" algn="l">
               <a:buNone/>
             </a:pPr>
             <a:r>
@@ -6493,7 +6253,7 @@
             <a:endParaRPr lang="en-US" sz="1700" dirty="0"/>
           </a:p>
           <a:p>
-            <a:pPr algn="l" indent="0" marL="0">
+            <a:pPr marL="0" indent="0" algn="l">
               <a:buNone/>
             </a:pPr>
             <a:r>
@@ -6561,7 +6321,7 @@
           </a:bodyPr>
           <a:lstStyle/>
           <a:p>
-            <a:pPr algn="ctr" indent="0" marL="0">
+            <a:pPr marL="0" indent="0" algn="ctr">
               <a:buNone/>
             </a:pPr>
             <a:r>
@@ -6654,7 +6414,7 @@
           </a:bodyPr>
           <a:lstStyle/>
           <a:p>
-            <a:pPr algn="l" indent="0" marL="0">
+            <a:pPr marL="0" indent="0" algn="l">
               <a:buNone/>
             </a:pPr>
             <a:r>
@@ -6695,7 +6455,7 @@
           </a:bodyPr>
           <a:lstStyle/>
           <a:p>
-            <a:pPr algn="l" indent="0" marL="0">
+            <a:pPr marL="0" indent="0" algn="l">
               <a:buNone/>
             </a:pPr>
             <a:r>
@@ -6712,7 +6472,7 @@
             <a:endParaRPr lang="en-US" sz="1700" dirty="0"/>
           </a:p>
           <a:p>
-            <a:pPr algn="l" indent="0" marL="0">
+            <a:pPr marL="0" indent="0" algn="l">
               <a:buNone/>
             </a:pPr>
             <a:r>
@@ -6780,7 +6540,7 @@
           </a:bodyPr>
           <a:lstStyle/>
           <a:p>
-            <a:pPr algn="ctr" indent="0" marL="0">
+            <a:pPr marL="0" indent="0" algn="ctr">
               <a:buNone/>
             </a:pPr>
             <a:r>
@@ -6848,7 +6608,7 @@
           </a:bodyPr>
           <a:lstStyle/>
           <a:p>
-            <a:pPr algn="l" indent="0" marL="0">
+            <a:pPr marL="0" indent="0" algn="l">
               <a:buNone/>
             </a:pPr>
             <a:r>
@@ -6889,7 +6649,7 @@
           </a:bodyPr>
           <a:lstStyle/>
           <a:p>
-            <a:pPr algn="l" indent="0" marL="0">
+            <a:pPr marL="0" indent="0" algn="l">
               <a:buNone/>
             </a:pPr>
             <a:r>
@@ -6930,7 +6690,7 @@
           </a:bodyPr>
           <a:lstStyle/>
           <a:p>
-            <a:pPr algn="l" indent="0" marL="0">
+            <a:pPr marL="0" indent="0" algn="l">
               <a:buNone/>
             </a:pPr>
             <a:r>
@@ -6996,7 +6756,7 @@
           </a:bodyPr>
           <a:lstStyle/>
           <a:p>
-            <a:pPr algn="l" indent="0" marL="0">
+            <a:pPr marL="0" indent="0" algn="l">
               <a:buNone/>
             </a:pPr>
             <a:r>
@@ -7037,7 +6797,7 @@
           </a:bodyPr>
           <a:lstStyle/>
           <a:p>
-            <a:pPr algn="l" indent="0" marL="0">
+            <a:pPr marL="0" indent="0" algn="l">
               <a:buNone/>
             </a:pPr>
             <a:r>
@@ -7105,7 +6865,7 @@
           </a:bodyPr>
           <a:lstStyle/>
           <a:p>
-            <a:pPr algn="ctr" indent="0" marL="0">
+            <a:pPr marL="0" indent="0" algn="ctr">
               <a:buNone/>
             </a:pPr>
             <a:r>
@@ -7125,7 +6885,7 @@
       </p:sp>
       <p:sp>
         <p:nvSpPr>
-          <p:cNvPr id="25" name="Slide Number Placeholder 0"/>
+          <p:cNvPr id="43" name="Slide Number Placeholder 0"/>
           <p:cNvSpPr>
             <a:spLocks noGrp="1"/>
           </p:cNvSpPr>
@@ -7143,7 +6903,7 @@
           </a:prstGeom>
           <a:extLst>
             <a:ext uri="{C572A759-6A51-4108-AA02-DFA0A04FC94B}">
-              <ma14:wrappingTextBoxFlag xmlns:ma14="http://schemas.microsoft.com/office/mac/drawingml/2011/main" val="0"/>
+              <ma14:wrappingTextBoxFlag xmlns:ma14="http://schemas.microsoft.com/office/mac/drawingml/2011/main" xmlns="" val="0"/>
             </a:ext>
           </a:extLst>
         </p:spPr>
@@ -7164,7 +6924,7 @@
           <a:p>
             <a:pPr algn="l"/>
             <a:fld id="{F7021451-1387-4CA6-816F-3879F97B5CBC}" type="slidenum">
-              <a:rPr b="0" lang="en-US"/>
+              <a:rPr lang="en-US" b="0"/>
               <a:t>5</a:t>
             </a:fld>
             <a:endParaRPr lang="en-US"/>
@@ -7219,11 +6979,11 @@
           </a:bodyPr>
           <a:lstStyle/>
           <a:p>
-            <a:pPr algn="l" indent="0" marL="0">
-              <a:buNone/>
-            </a:pPr>
-            <a:r>
-              <a:rPr lang="en-US" sz="900" b="1" spc="120" kern="0" dirty="0">
+            <a:pPr marL="0" indent="0" algn="l">
+              <a:buNone/>
+            </a:pPr>
+            <a:r>
+              <a:rPr lang="en-US" sz="900" b="1" kern="0" spc="120" dirty="0">
                 <a:solidFill>
                   <a:srgbClr val="16766F"/>
                 </a:solidFill>
@@ -7260,7 +7020,7 @@
           </a:bodyPr>
           <a:lstStyle/>
           <a:p>
-            <a:pPr algn="l" indent="0" marL="0">
+            <a:pPr marL="0" indent="0" algn="l">
               <a:buNone/>
             </a:pPr>
             <a:r>
@@ -7301,7 +7061,7 @@
           </a:bodyPr>
           <a:lstStyle/>
           <a:p>
-            <a:pPr algn="l" indent="0" marL="0">
+            <a:pPr marL="0" indent="0" algn="l">
               <a:buNone/>
             </a:pPr>
             <a:r>
@@ -7369,7 +7129,7 @@
           </a:bodyPr>
           <a:lstStyle/>
           <a:p>
-            <a:pPr algn="l" indent="0" marL="0">
+            <a:pPr marL="0" indent="0" algn="l">
               <a:buNone/>
             </a:pPr>
             <a:r>
@@ -7437,7 +7197,7 @@
           </a:bodyPr>
           <a:lstStyle/>
           <a:p>
-            <a:pPr algn="l" indent="0" marL="0">
+            <a:pPr marL="0" indent="0" algn="l">
               <a:buNone/>
             </a:pPr>
             <a:r>
@@ -7478,7 +7238,7 @@
           </a:bodyPr>
           <a:lstStyle/>
           <a:p>
-            <a:pPr algn="l" indent="0" marL="0">
+            <a:pPr marL="0" indent="0" algn="l">
               <a:buNone/>
             </a:pPr>
             <a:r>
@@ -7546,7 +7306,7 @@
           </a:bodyPr>
           <a:lstStyle/>
           <a:p>
-            <a:pPr algn="l" indent="0" marL="0">
+            <a:pPr marL="0" indent="0" algn="l">
               <a:buNone/>
             </a:pPr>
             <a:r>
@@ -7587,7 +7347,7 @@
           </a:bodyPr>
           <a:lstStyle/>
           <a:p>
-            <a:pPr algn="l" indent="0" marL="0">
+            <a:pPr marL="0" indent="0" algn="l">
               <a:buNone/>
             </a:pPr>
             <a:r>
@@ -7655,7 +7415,7 @@
           </a:bodyPr>
           <a:lstStyle/>
           <a:p>
-            <a:pPr algn="l" indent="0" marL="0">
+            <a:pPr marL="0" indent="0" algn="l">
               <a:buNone/>
             </a:pPr>
             <a:r>
@@ -7696,7 +7456,7 @@
           </a:bodyPr>
           <a:lstStyle/>
           <a:p>
-            <a:pPr algn="l" indent="0" marL="0">
+            <a:pPr marL="0" indent="0" algn="l">
               <a:buNone/>
             </a:pPr>
             <a:r>
@@ -7737,7 +7497,7 @@
           </a:bodyPr>
           <a:lstStyle/>
           <a:p>
-            <a:pPr algn="ctr" indent="0" marL="0">
+            <a:pPr marL="0" indent="0" algn="ctr">
               <a:buNone/>
             </a:pPr>
             <a:r>
@@ -7805,7 +7565,7 @@
           </a:bodyPr>
           <a:lstStyle/>
           <a:p>
-            <a:pPr algn="l" indent="0" marL="0">
+            <a:pPr marL="0" indent="0" algn="l">
               <a:buNone/>
             </a:pPr>
             <a:r>
@@ -7825,14 +7585,14 @@
       </p:sp>
       <p:pic>
         <p:nvPicPr>
-          <p:cNvPr id="19" name="Image 0" descr="D:\大三上小学期\机器学习综合实践\ml-project\reports\M1证据_B0已知元件扫描.png">    </p:cNvPr>
+          <p:cNvPr id="19" name="Image 0" descr="D:\大三上小学期\机器学习综合实践\ml-project\reports\M1证据_B0已知元件扫描.png"/>
           <p:cNvPicPr>
             <a:picLocks noChangeAspect="1"/>
           </p:cNvPicPr>
           <p:nvPr/>
         </p:nvPicPr>
         <p:blipFill>
-          <a:blip r:embed="rId1"/>
+          <a:blip r:embed="rId3"/>
           <a:stretch>
             <a:fillRect/>
           </a:stretch>
@@ -7870,7 +7630,7 @@
           </a:bodyPr>
           <a:lstStyle/>
           <a:p>
-            <a:pPr algn="l" indent="0" marL="0">
+            <a:pPr marL="0" indent="0" algn="l">
               <a:buNone/>
             </a:pPr>
             <a:r>
@@ -7908,7 +7668,7 @@
           </a:prstGeom>
           <a:extLst>
             <a:ext uri="{C572A759-6A51-4108-AA02-DFA0A04FC94B}">
-              <ma14:wrappingTextBoxFlag xmlns:ma14="http://schemas.microsoft.com/office/mac/drawingml/2011/main" val="0"/>
+              <ma14:wrappingTextBoxFlag xmlns:ma14="http://schemas.microsoft.com/office/mac/drawingml/2011/main" xmlns="" val="0"/>
             </a:ext>
           </a:extLst>
         </p:spPr>
@@ -7929,7 +7689,7 @@
           <a:p>
             <a:pPr algn="l"/>
             <a:fld id="{F7021451-1387-4CA6-816F-3879F97B5CBC}" type="slidenum">
-              <a:rPr b="0" lang="en-US"/>
+              <a:rPr lang="en-US" b="0"/>
               <a:t>6</a:t>
             </a:fld>
             <a:endParaRPr lang="en-US"/>
@@ -7984,11 +7744,11 @@
           </a:bodyPr>
           <a:lstStyle/>
           <a:p>
-            <a:pPr algn="l" indent="0" marL="0">
-              <a:buNone/>
-            </a:pPr>
-            <a:r>
-              <a:rPr lang="en-US" sz="900" b="1" spc="120" kern="0" dirty="0">
+            <a:pPr marL="0" indent="0" algn="l">
+              <a:buNone/>
+            </a:pPr>
+            <a:r>
+              <a:rPr lang="en-US" sz="900" b="1" kern="0" spc="120" dirty="0">
                 <a:solidFill>
                   <a:srgbClr val="16766F"/>
                 </a:solidFill>
@@ -8025,7 +7785,7 @@
           </a:bodyPr>
           <a:lstStyle/>
           <a:p>
-            <a:pPr algn="l" indent="0" marL="0">
+            <a:pPr marL="0" indent="0" algn="l">
               <a:buNone/>
             </a:pPr>
             <a:r>
@@ -8066,7 +7826,7 @@
           </a:bodyPr>
           <a:lstStyle/>
           <a:p>
-            <a:pPr algn="l" indent="0" marL="0">
+            <a:pPr marL="0" indent="0" algn="l">
               <a:buNone/>
             </a:pPr>
             <a:r>
@@ -8134,7 +7894,7 @@
           </a:bodyPr>
           <a:lstStyle/>
           <a:p>
-            <a:pPr algn="l" indent="0" marL="0">
+            <a:pPr marL="0" indent="0" algn="l">
               <a:buNone/>
             </a:pPr>
             <a:r>
@@ -8200,7 +7960,7 @@
           </a:bodyPr>
           <a:lstStyle/>
           <a:p>
-            <a:pPr algn="l" indent="0" marL="0">
+            <a:pPr marL="0" indent="0" algn="l">
               <a:buNone/>
             </a:pPr>
             <a:r>
@@ -8266,7 +8026,7 @@
           </a:bodyPr>
           <a:lstStyle/>
           <a:p>
-            <a:pPr algn="l" indent="0" marL="0">
+            <a:pPr marL="0" indent="0" algn="l">
               <a:buNone/>
             </a:pPr>
             <a:r>
@@ -8332,7 +8092,7 @@
           </a:bodyPr>
           <a:lstStyle/>
           <a:p>
-            <a:pPr algn="l" indent="0" marL="0">
+            <a:pPr marL="0" indent="0" algn="l">
               <a:buNone/>
             </a:pPr>
             <a:r>
@@ -8398,7 +8158,7 @@
           </a:bodyPr>
           <a:lstStyle/>
           <a:p>
-            <a:pPr algn="l" indent="0" marL="0">
+            <a:pPr marL="0" indent="0" algn="l">
               <a:buNone/>
             </a:pPr>
             <a:r>
@@ -8464,7 +8224,7 @@
           </a:bodyPr>
           <a:lstStyle/>
           <a:p>
-            <a:pPr algn="l" indent="0" marL="0">
+            <a:pPr marL="0" indent="0" algn="l">
               <a:buNone/>
             </a:pPr>
             <a:r>
@@ -8530,7 +8290,7 @@
           </a:bodyPr>
           <a:lstStyle/>
           <a:p>
-            <a:pPr algn="l" indent="0" marL="0">
+            <a:pPr marL="0" indent="0" algn="l">
               <a:buNone/>
             </a:pPr>
             <a:r>
@@ -8598,7 +8358,7 @@
           </a:bodyPr>
           <a:lstStyle/>
           <a:p>
-            <a:pPr algn="l" indent="0" marL="0">
+            <a:pPr marL="0" indent="0" algn="l">
               <a:buNone/>
             </a:pPr>
             <a:r>
@@ -8666,7 +8426,7 @@
           </a:bodyPr>
           <a:lstStyle/>
           <a:p>
-            <a:pPr algn="ctr" indent="0" marL="0">
+            <a:pPr marL="0" indent="0" algn="ctr">
               <a:buNone/>
             </a:pPr>
             <a:r>
@@ -8759,7 +8519,7 @@
           </a:bodyPr>
           <a:lstStyle/>
           <a:p>
-            <a:pPr algn="ctr" indent="0" marL="0">
+            <a:pPr marL="0" indent="0" algn="ctr">
               <a:buNone/>
             </a:pPr>
             <a:r>
@@ -8852,7 +8612,7 @@
           </a:bodyPr>
           <a:lstStyle/>
           <a:p>
-            <a:pPr algn="ctr" indent="0" marL="0">
+            <a:pPr marL="0" indent="0" algn="ctr">
               <a:buNone/>
             </a:pPr>
             <a:r>
@@ -8945,7 +8705,7 @@
           </a:bodyPr>
           <a:lstStyle/>
           <a:p>
-            <a:pPr algn="ctr" indent="0" marL="0">
+            <a:pPr marL="0" indent="0" algn="ctr">
               <a:buNone/>
             </a:pPr>
             <a:r>
@@ -9038,7 +8798,7 @@
           </a:bodyPr>
           <a:lstStyle/>
           <a:p>
-            <a:pPr algn="ctr" indent="0" marL="0">
+            <a:pPr marL="0" indent="0" algn="ctr">
               <a:buNone/>
             </a:pPr>
             <a:r>
@@ -9079,7 +8839,7 @@
           </a:bodyPr>
           <a:lstStyle/>
           <a:p>
-            <a:pPr algn="l" indent="0" marL="0">
+            <a:pPr marL="0" indent="0" algn="l">
               <a:buNone/>
             </a:pPr>
             <a:r>
@@ -9147,7 +8907,7 @@
           </a:bodyPr>
           <a:lstStyle/>
           <a:p>
-            <a:pPr algn="l" indent="0" marL="0">
+            <a:pPr marL="0" indent="0" algn="l">
               <a:buNone/>
             </a:pPr>
             <a:r>
@@ -9188,7 +8948,7 @@
           </a:bodyPr>
           <a:lstStyle/>
           <a:p>
-            <a:pPr algn="l" indent="0" marL="0">
+            <a:pPr marL="0" indent="0" algn="l">
               <a:buNone/>
             </a:pPr>
             <a:r>
@@ -9205,7 +8965,7 @@
             <a:endParaRPr lang="en-US" sz="1150" dirty="0"/>
           </a:p>
           <a:p>
-            <a:pPr algn="l" indent="0" marL="0">
+            <a:pPr marL="0" indent="0" algn="l">
               <a:buNone/>
             </a:pPr>
             <a:r>
@@ -9222,7 +8982,7 @@
             <a:endParaRPr lang="en-US" sz="1150" dirty="0"/>
           </a:p>
           <a:p>
-            <a:pPr algn="l" indent="0" marL="0">
+            <a:pPr marL="0" indent="0" algn="l">
               <a:buNone/>
             </a:pPr>
             <a:r>
@@ -9242,14 +9002,14 @@
       </p:sp>
       <p:pic>
         <p:nvPicPr>
-          <p:cNvPr id="39" name="Image 0" descr="D:\大三上小学期\机器学习综合实践\ml-project\reports\M1证据_可复现环境检查.png">    </p:cNvPr>
+          <p:cNvPr id="39" name="Image 0" descr="D:\大三上小学期\机器学习综合实践\ml-project\reports\M1证据_可复现环境检查.png"/>
           <p:cNvPicPr>
             <a:picLocks noChangeAspect="1"/>
           </p:cNvPicPr>
           <p:nvPr/>
         </p:nvPicPr>
         <p:blipFill>
-          <a:blip r:embed="rId1"/>
+          <a:blip r:embed="rId3"/>
           <a:stretch>
             <a:fillRect/>
           </a:stretch>
@@ -9287,7 +9047,7 @@
           </a:bodyPr>
           <a:lstStyle/>
           <a:p>
-            <a:pPr algn="ctr" indent="0" marL="0">
+            <a:pPr marL="0" indent="0" algn="ctr">
               <a:buNone/>
             </a:pPr>
             <a:r>
@@ -9307,7 +9067,7 @@
       </p:sp>
       <p:sp>
         <p:nvSpPr>
-          <p:cNvPr id="25" name="Slide Number Placeholder 0"/>
+          <p:cNvPr id="41" name="Slide Number Placeholder 0"/>
           <p:cNvSpPr>
             <a:spLocks noGrp="1"/>
           </p:cNvSpPr>
@@ -9325,7 +9085,7 @@
           </a:prstGeom>
           <a:extLst>
             <a:ext uri="{C572A759-6A51-4108-AA02-DFA0A04FC94B}">
-              <ma14:wrappingTextBoxFlag xmlns:ma14="http://schemas.microsoft.com/office/mac/drawingml/2011/main" val="0"/>
+              <ma14:wrappingTextBoxFlag xmlns:ma14="http://schemas.microsoft.com/office/mac/drawingml/2011/main" xmlns="" val="0"/>
             </a:ext>
           </a:extLst>
         </p:spPr>
@@ -9346,7 +9106,7 @@
           <a:p>
             <a:pPr algn="l"/>
             <a:fld id="{F7021451-1387-4CA6-816F-3879F97B5CBC}" type="slidenum">
-              <a:rPr b="0" lang="en-US"/>
+              <a:rPr lang="en-US" b="0"/>
               <a:t>7</a:t>
             </a:fld>
             <a:endParaRPr lang="en-US"/>
@@ -9654,4 +9414,299 @@
     </a:ext>
   </a:extLst>
 </a:theme>
+</file>
+
+<file path=ppt/theme/theme2.xml><?xml version="1.0" encoding="utf-8"?>
+<a:theme xmlns:a="http://schemas.openxmlformats.org/drawingml/2006/main" name="Office 主题​​">
+  <a:themeElements>
+    <a:clrScheme name="Office">
+      <a:dk1>
+        <a:sysClr val="windowText" lastClr="000000"/>
+      </a:dk1>
+      <a:lt1>
+        <a:sysClr val="window" lastClr="FFFFFF"/>
+      </a:lt1>
+      <a:dk2>
+        <a:srgbClr val="44546A"/>
+      </a:dk2>
+      <a:lt2>
+        <a:srgbClr val="E7E6E6"/>
+      </a:lt2>
+      <a:accent1>
+        <a:srgbClr val="4472C4"/>
+      </a:accent1>
+      <a:accent2>
+        <a:srgbClr val="ED7D31"/>
+      </a:accent2>
+      <a:accent3>
+        <a:srgbClr val="A5A5A5"/>
+      </a:accent3>
+      <a:accent4>
+        <a:srgbClr val="FFC000"/>
+      </a:accent4>
+      <a:accent5>
+        <a:srgbClr val="5B9BD5"/>
+      </a:accent5>
+      <a:accent6>
+        <a:srgbClr val="70AD47"/>
+      </a:accent6>
+      <a:hlink>
+        <a:srgbClr val="0563C1"/>
+      </a:hlink>
+      <a:folHlink>
+        <a:srgbClr val="954F72"/>
+      </a:folHlink>
+    </a:clrScheme>
+    <a:fontScheme name="Office">
+      <a:majorFont>
+        <a:latin typeface="等线 Light" panose="020F0302020204030204"/>
+        <a:ea typeface=""/>
+        <a:cs typeface=""/>
+        <a:font script="Jpan" typeface="游ゴシック Light"/>
+        <a:font script="Hang" typeface="맑은 고딕"/>
+        <a:font script="Hans" typeface="等线 Light"/>
+        <a:font script="Hant" typeface="新細明體"/>
+        <a:font script="Arab" typeface="Times New Roman"/>
+        <a:font script="Hebr" typeface="Times New Roman"/>
+        <a:font script="Thai" typeface="Angsana New"/>
+        <a:font script="Ethi" typeface="Nyala"/>
+        <a:font script="Beng" typeface="Vrinda"/>
+        <a:font script="Gujr" typeface="Shruti"/>
+        <a:font script="Khmr" typeface="MoolBoran"/>
+        <a:font script="Knda" typeface="Tunga"/>
+        <a:font script="Guru" typeface="Raavi"/>
+        <a:font script="Cans" typeface="Euphemia"/>
+        <a:font script="Cher" typeface="Plantagenet Cherokee"/>
+        <a:font script="Yiii" typeface="Microsoft Yi Baiti"/>
+        <a:font script="Tibt" typeface="Microsoft Himalaya"/>
+        <a:font script="Thaa" typeface="MV Boli"/>
+        <a:font script="Deva" typeface="Mangal"/>
+        <a:font script="Telu" typeface="Gautami"/>
+        <a:font script="Taml" typeface="Latha"/>
+        <a:font script="Syrc" typeface="Estrangelo Edessa"/>
+        <a:font script="Orya" typeface="Kalinga"/>
+        <a:font script="Mlym" typeface="Kartika"/>
+        <a:font script="Laoo" typeface="DokChampa"/>
+        <a:font script="Sinh" typeface="Iskoola Pota"/>
+        <a:font script="Mong" typeface="Mongolian Baiti"/>
+        <a:font script="Viet" typeface="Times New Roman"/>
+        <a:font script="Uigh" typeface="Microsoft Uighur"/>
+        <a:font script="Geor" typeface="Sylfaen"/>
+        <a:font script="Armn" typeface="Arial"/>
+        <a:font script="Bugi" typeface="Leelawadee UI"/>
+        <a:font script="Bopo" typeface="Microsoft JhengHei"/>
+        <a:font script="Java" typeface="Javanese Text"/>
+        <a:font script="Lisu" typeface="Segoe UI"/>
+        <a:font script="Mymr" typeface="Myanmar Text"/>
+        <a:font script="Nkoo" typeface="Ebrima"/>
+        <a:font script="Olck" typeface="Nirmala UI"/>
+        <a:font script="Osma" typeface="Ebrima"/>
+        <a:font script="Phag" typeface="Phagspa"/>
+        <a:font script="Syrn" typeface="Estrangelo Edessa"/>
+        <a:font script="Syrj" typeface="Estrangelo Edessa"/>
+        <a:font script="Syre" typeface="Estrangelo Edessa"/>
+        <a:font script="Sora" typeface="Nirmala UI"/>
+        <a:font script="Tale" typeface="Microsoft Tai Le"/>
+        <a:font script="Talu" typeface="Microsoft New Tai Lue"/>
+        <a:font script="Tfng" typeface="Ebrima"/>
+      </a:majorFont>
+      <a:minorFont>
+        <a:latin typeface="等线" panose="020F0502020204030204"/>
+        <a:ea typeface=""/>
+        <a:cs typeface=""/>
+        <a:font script="Jpan" typeface="游ゴシック"/>
+        <a:font script="Hang" typeface="맑은 고딕"/>
+        <a:font script="Hans" typeface="等线"/>
+        <a:font script="Hant" typeface="新細明體"/>
+        <a:font script="Arab" typeface="Arial"/>
+        <a:font script="Hebr" typeface="Arial"/>
+        <a:font script="Thai" typeface="Cordia New"/>
+        <a:font script="Ethi" typeface="Nyala"/>
+        <a:font script="Beng" typeface="Vrinda"/>
+        <a:font script="Gujr" typeface="Shruti"/>
+        <a:font script="Khmr" typeface="DaunPenh"/>
+        <a:font script="Knda" typeface="Tunga"/>
+        <a:font script="Guru" typeface="Raavi"/>
+        <a:font script="Cans" typeface="Euphemia"/>
+        <a:font script="Cher" typeface="Plantagenet Cherokee"/>
+        <a:font script="Yiii" typeface="Microsoft Yi Baiti"/>
+        <a:font script="Tibt" typeface="Microsoft Himalaya"/>
+        <a:font script="Thaa" typeface="MV Boli"/>
+        <a:font script="Deva" typeface="Mangal"/>
+        <a:font script="Telu" typeface="Gautami"/>
+        <a:font script="Taml" typeface="Latha"/>
+        <a:font script="Syrc" typeface="Estrangelo Edessa"/>
+        <a:font script="Orya" typeface="Kalinga"/>
+        <a:font script="Mlym" typeface="Kartika"/>
+        <a:font script="Laoo" typeface="DokChampa"/>
+        <a:font script="Sinh" typeface="Iskoola Pota"/>
+        <a:font script="Mong" typeface="Mongolian Baiti"/>
+        <a:font script="Viet" typeface="Arial"/>
+        <a:font script="Uigh" typeface="Microsoft Uighur"/>
+        <a:font script="Geor" typeface="Sylfaen"/>
+        <a:font script="Armn" typeface="Arial"/>
+        <a:font script="Bugi" typeface="Leelawadee UI"/>
+        <a:font script="Bopo" typeface="Microsoft JhengHei"/>
+        <a:font script="Java" typeface="Javanese Text"/>
+        <a:font script="Lisu" typeface="Segoe UI"/>
+        <a:font script="Mymr" typeface="Myanmar Text"/>
+        <a:font script="Nkoo" typeface="Ebrima"/>
+        <a:font script="Olck" typeface="Nirmala UI"/>
+        <a:font script="Osma" typeface="Ebrima"/>
+        <a:font script="Phag" typeface="Phagspa"/>
+        <a:font script="Syrn" typeface="Estrangelo Edessa"/>
+        <a:font script="Syrj" typeface="Estrangelo Edessa"/>
+        <a:font script="Syre" typeface="Estrangelo Edessa"/>
+        <a:font script="Sora" typeface="Nirmala UI"/>
+        <a:font script="Tale" typeface="Microsoft Tai Le"/>
+        <a:font script="Talu" typeface="Microsoft New Tai Lue"/>
+        <a:font script="Tfng" typeface="Ebrima"/>
+      </a:minorFont>
+    </a:fontScheme>
+    <a:fmtScheme name="Office">
+      <a:fillStyleLst>
+        <a:solidFill>
+          <a:schemeClr val="phClr"/>
+        </a:solidFill>
+        <a:gradFill rotWithShape="1">
+          <a:gsLst>
+            <a:gs pos="0">
+              <a:schemeClr val="phClr">
+                <a:lumMod val="110000"/>
+                <a:satMod val="105000"/>
+                <a:tint val="67000"/>
+              </a:schemeClr>
+            </a:gs>
+            <a:gs pos="50000">
+              <a:schemeClr val="phClr">
+                <a:lumMod val="105000"/>
+                <a:satMod val="103000"/>
+                <a:tint val="73000"/>
+              </a:schemeClr>
+            </a:gs>
+            <a:gs pos="100000">
+              <a:schemeClr val="phClr">
+                <a:lumMod val="105000"/>
+                <a:satMod val="109000"/>
+                <a:tint val="81000"/>
+              </a:schemeClr>
+            </a:gs>
+          </a:gsLst>
+          <a:lin ang="5400000" scaled="0"/>
+        </a:gradFill>
+        <a:gradFill rotWithShape="1">
+          <a:gsLst>
+            <a:gs pos="0">
+              <a:schemeClr val="phClr">
+                <a:satMod val="103000"/>
+                <a:lumMod val="102000"/>
+                <a:tint val="94000"/>
+              </a:schemeClr>
+            </a:gs>
+            <a:gs pos="50000">
+              <a:schemeClr val="phClr">
+                <a:satMod val="110000"/>
+                <a:lumMod val="100000"/>
+                <a:shade val="100000"/>
+              </a:schemeClr>
+            </a:gs>
+            <a:gs pos="100000">
+              <a:schemeClr val="phClr">
+                <a:lumMod val="99000"/>
+                <a:satMod val="120000"/>
+                <a:shade val="78000"/>
+              </a:schemeClr>
+            </a:gs>
+          </a:gsLst>
+          <a:lin ang="5400000" scaled="0"/>
+        </a:gradFill>
+      </a:fillStyleLst>
+      <a:lnStyleLst>
+        <a:ln w="6350" cap="flat" cmpd="sng" algn="ctr">
+          <a:solidFill>
+            <a:schemeClr val="phClr"/>
+          </a:solidFill>
+          <a:prstDash val="solid"/>
+          <a:miter lim="800000"/>
+        </a:ln>
+        <a:ln w="12700" cap="flat" cmpd="sng" algn="ctr">
+          <a:solidFill>
+            <a:schemeClr val="phClr"/>
+          </a:solidFill>
+          <a:prstDash val="solid"/>
+          <a:miter lim="800000"/>
+        </a:ln>
+        <a:ln w="19050" cap="flat" cmpd="sng" algn="ctr">
+          <a:solidFill>
+            <a:schemeClr val="phClr"/>
+          </a:solidFill>
+          <a:prstDash val="solid"/>
+          <a:miter lim="800000"/>
+        </a:ln>
+      </a:lnStyleLst>
+      <a:effectStyleLst>
+        <a:effectStyle>
+          <a:effectLst/>
+        </a:effectStyle>
+        <a:effectStyle>
+          <a:effectLst/>
+        </a:effectStyle>
+        <a:effectStyle>
+          <a:effectLst>
+            <a:outerShdw blurRad="57150" dist="19050" dir="5400000" algn="ctr" rotWithShape="0">
+              <a:srgbClr val="000000">
+                <a:alpha val="63000"/>
+              </a:srgbClr>
+            </a:outerShdw>
+          </a:effectLst>
+        </a:effectStyle>
+      </a:effectStyleLst>
+      <a:bgFillStyleLst>
+        <a:solidFill>
+          <a:schemeClr val="phClr"/>
+        </a:solidFill>
+        <a:solidFill>
+          <a:schemeClr val="phClr">
+            <a:tint val="95000"/>
+            <a:satMod val="170000"/>
+          </a:schemeClr>
+        </a:solidFill>
+        <a:gradFill rotWithShape="1">
+          <a:gsLst>
+            <a:gs pos="0">
+              <a:schemeClr val="phClr">
+                <a:tint val="93000"/>
+                <a:satMod val="150000"/>
+                <a:shade val="98000"/>
+                <a:lumMod val="102000"/>
+              </a:schemeClr>
+            </a:gs>
+            <a:gs pos="50000">
+              <a:schemeClr val="phClr">
+                <a:tint val="98000"/>
+                <a:satMod val="130000"/>
+                <a:shade val="90000"/>
+                <a:lumMod val="103000"/>
+              </a:schemeClr>
+            </a:gs>
+            <a:gs pos="100000">
+              <a:schemeClr val="phClr">
+                <a:shade val="63000"/>
+                <a:satMod val="120000"/>
+              </a:schemeClr>
+            </a:gs>
+          </a:gsLst>
+          <a:lin ang="5400000" scaled="0"/>
+        </a:gradFill>
+      </a:bgFillStyleLst>
+    </a:fmtScheme>
+  </a:themeElements>
+  <a:objectDefaults/>
+  <a:extraClrSchemeLst/>
+  <a:extLst>
+    <a:ext uri="{05A4C25C-085E-4340-85A3-A5531E510DB2}">
+      <thm15:themeFamily xmlns:thm15="http://schemas.microsoft.com/office/thememl/2012/main" name="Office Theme" id="{62F939B6-93AF-4DB8-9C6B-D6C7DFDC589F}" vid="{4A3C46E8-61CC-4603-A589-7422A47A8E4A}"/>
+    </a:ext>
+  </a:extLst>
+</a:theme>
 </file>